--- a/presentations/06_UAE_Wills_Inheritance_Statistics_AR.pptx
+++ b/presentations/06_UAE_Wills_Inheritance_Statistics_AR.pptx
@@ -132,20 +132,20 @@
   <p:extLst>
     <p:ext uri="{521415D9-36F7-43E2-AB2F-B90AF26B5E84}">
       <p14:sectionLst xmlns:p14="http://schemas.microsoft.com/office/powerpoint/2010/main">
-        <p14:section name="المقدمة" id="{904cb957-f7c5-c046-7013-05baf9afd0f5}">
+        <p14:section name="المقدمة" id="{6a079376-c191-efcc-ef75-2c7e0673c840}">
           <p14:sldIdLst>
             <p14:sldId id="256"/>
             <p14:sldId id="257"/>
             <p14:sldId id="258"/>
           </p14:sldIdLst>
         </p14:section>
-        <p14:section name="السياق" id="{7b60dacc-2590-7a7b-d59f-f6196b12a82c}">
+        <p14:section name="السياق" id="{24b338fb-4d69-9ae1-1c40-d255101db0da}">
           <p14:sldIdLst>
             <p14:sldId id="259"/>
             <p14:sldId id="260"/>
           </p14:sldIdLst>
         </p14:section>
-        <p14:section name="من يملك وصية" id="{7a98c3b7-1c9d-6150-1c1d-a059af777865}">
+        <p14:section name="من يملك وصية" id="{696766bd-082f-324e-b2dc-885aada55b5c}">
           <p14:sldIdLst>
             <p14:sldId id="261"/>
             <p14:sldId id="262"/>
@@ -156,7 +156,7 @@
             <p14:sldId id="267"/>
           </p14:sldIdLst>
         </p14:section>
-        <p14:section name="السرعة والمشاكل" id="{36bcc4b2-8885-b445-5b46-2eb6f2369114}">
+        <p14:section name="السرعة والمشاكل" id="{06a136ed-f9c0-55f4-5e3a-dad5d336e8e3}">
           <p14:sldIdLst>
             <p14:sldId id="268"/>
             <p14:sldId id="269"/>
@@ -165,7 +165,7 @@
             <p14:sldId id="272"/>
           </p14:sldIdLst>
         </p14:section>
-        <p14:section name="الشركات" id="{58f47540-6422-a7b2-c666-ded24bcbed80}">
+        <p14:section name="الشركات" id="{1a31948f-44a7-b210-9385-462d64d3ea53}">
           <p14:sldIdLst>
             <p14:sldId id="273"/>
             <p14:sldId id="274"/>
@@ -173,7 +173,7 @@
             <p14:sldId id="276"/>
           </p14:sldIdLst>
         </p14:section>
-        <p14:section name="حدود البيانات" id="{e1ebbbeb-0ccf-5826-d271-91f7ac57de62}">
+        <p14:section name="حدود البيانات" id="{1c3d6d0e-68b2-22af-81d3-bf45310183f6}">
           <p14:sldIdLst>
             <p14:sldId id="277"/>
             <p14:sldId id="278"/>
@@ -4567,106 +4567,30 @@
           <a:chExt cx="0" cy="0"/>
         </a:xfrm>
       </p:grpSpPr>
-      <p:sp>
-        <p:nvSpPr>
-          <p:cNvPr id="2" name="Shape 0"/>
-          <p:cNvSpPr/>
-          <p:nvPr/>
-        </p:nvSpPr>
-        <p:spPr>
-          <a:xfrm>
-            <a:off x="8394192" y="4626864"/>
-            <a:ext cx="384048" cy="384048"/>
-          </a:xfrm>
-          <a:prstGeom prst="rect">
-            <a:avLst/>
-          </a:prstGeom>
-          <a:solidFill>
-            <a:srgbClr val="0E2238"/>
-          </a:solidFill>
-          <a:ln w="9525">
-            <a:solidFill>
-              <a:srgbClr val="B5723B"/>
-            </a:solidFill>
-            <a:prstDash val="solid"/>
-          </a:ln>
-        </p:spPr>
-      </p:sp>
-      <p:sp>
-        <p:nvSpPr>
-          <p:cNvPr id="3" name="Text 1"/>
-          <p:cNvSpPr/>
-          <p:nvPr/>
-        </p:nvSpPr>
-        <p:spPr>
-          <a:xfrm>
-            <a:off x="8394192" y="4626864"/>
-            <a:ext cx="384048" cy="384048"/>
-          </a:xfrm>
-          <a:prstGeom prst="rect">
-            <a:avLst/>
-          </a:prstGeom>
-          <a:noFill/>
-          <a:ln/>
-        </p:spPr>
-        <p:txBody>
-          <a:bodyPr wrap="square" lIns="0" tIns="0" rIns="0" bIns="0" rtlCol="0" anchor="ctr"/>
-          <a:lstStyle/>
-          <a:p>
-            <a:pPr algn="ctr" indent="0" marL="0">
-              <a:buNone/>
-            </a:pPr>
-            <a:r>
-              <a:rPr lang="en-US" sz="1000" b="1" dirty="0">
-                <a:solidFill>
-                  <a:srgbClr val="B5723B"/>
-                </a:solidFill>
-                <a:latin typeface="Cambria" pitchFamily="34" charset="0"/>
-                <a:ea typeface="Cambria" pitchFamily="34" charset="-122"/>
-                <a:cs typeface="Cambria" pitchFamily="34" charset="-120"/>
-              </a:rPr>
-              <a:t>RK</a:t>
-            </a:r>
-            <a:endParaRPr lang="en-US" sz="1000" dirty="0"/>
-          </a:p>
-        </p:txBody>
-      </p:sp>
-      <p:sp>
-        <p:nvSpPr>
-          <p:cNvPr id="4" name="Text 2"/>
-          <p:cNvSpPr/>
-          <p:nvPr/>
-        </p:nvSpPr>
-        <p:spPr>
-          <a:xfrm>
-            <a:off x="3200400" y="4626864"/>
-            <a:ext cx="5120640" cy="384048"/>
-          </a:xfrm>
-          <a:prstGeom prst="rect">
-            <a:avLst/>
-          </a:prstGeom>
-          <a:noFill/>
-          <a:ln/>
-        </p:spPr>
-        <p:txBody>
-          <a:bodyPr wrap="square" lIns="0" tIns="0" rIns="0" bIns="0" rtlCol="0" anchor="ctr"/>
-          <a:lstStyle/>
-          <a:p>
-            <a:pPr algn="r" indent="0" marL="0">
-              <a:buNone/>
-            </a:pPr>
-            <a:r>
-              <a:rPr lang="en-US" sz="900" dirty="0">
-                <a:solidFill>
-                  <a:srgbClr val="D9B38C"/>
-                </a:solidFill>
-              </a:rPr>
-              <a:t>راشد الكيتوب للمحاماة والاستشارات القانونية</a:t>
-            </a:r>
-            <a:endParaRPr lang="en-US" sz="900" dirty="0"/>
-          </a:p>
-        </p:txBody>
-      </p:sp>
+      <p:pic>
+        <p:nvPicPr>
+          <p:cNvPr id="2" name="Image 0" descr="/tmp/claude-0/-home-user-aa/b81485da-2e22-5d10-878f-01904e6d5dc6/scratchpad/rk/logo_dark.png">    </p:cNvPr>
+          <p:cNvPicPr>
+            <a:picLocks noChangeAspect="1"/>
+          </p:cNvPicPr>
+          <p:nvPr/>
+        </p:nvPicPr>
+        <p:blipFill>
+          <a:blip r:embed="rId1"/>
+          <a:stretch>
+            <a:fillRect/>
+          </a:stretch>
+        </p:blipFill>
+        <p:spPr>
+          <a:xfrm>
+            <a:off x="7102823" y="4681728"/>
+            <a:ext cx="1675417" cy="274320"/>
+          </a:xfrm>
+          <a:prstGeom prst="rect">
+            <a:avLst/>
+          </a:prstGeom>
+        </p:spPr>
+      </p:pic>
       <p:sp>
         <p:nvSpPr>
           <p:cNvPr id="25" name="Slide Number Placeholder 0"/>
@@ -4744,112 +4668,36 @@
           <a:chExt cx="0" cy="0"/>
         </a:xfrm>
       </p:grpSpPr>
-      <p:sp>
-        <p:nvSpPr>
-          <p:cNvPr id="2" name="Shape 0"/>
-          <p:cNvSpPr/>
-          <p:nvPr/>
-        </p:nvSpPr>
-        <p:spPr>
-          <a:xfrm>
-            <a:off x="8394192" y="4626864"/>
-            <a:ext cx="384048" cy="384048"/>
-          </a:xfrm>
-          <a:prstGeom prst="rect">
-            <a:avLst/>
-          </a:prstGeom>
-          <a:solidFill>
-            <a:srgbClr val="FFFFFF"/>
-          </a:solidFill>
-          <a:ln w="9525">
-            <a:solidFill>
-              <a:srgbClr val="B5723B"/>
-            </a:solidFill>
-            <a:prstDash val="solid"/>
-          </a:ln>
-        </p:spPr>
-      </p:sp>
-      <p:sp>
-        <p:nvSpPr>
-          <p:cNvPr id="3" name="Text 1"/>
-          <p:cNvSpPr/>
-          <p:nvPr/>
-        </p:nvSpPr>
-        <p:spPr>
-          <a:xfrm>
-            <a:off x="8394192" y="4626864"/>
-            <a:ext cx="384048" cy="384048"/>
-          </a:xfrm>
-          <a:prstGeom prst="rect">
-            <a:avLst/>
-          </a:prstGeom>
-          <a:noFill/>
-          <a:ln/>
-        </p:spPr>
-        <p:txBody>
-          <a:bodyPr wrap="square" lIns="0" tIns="0" rIns="0" bIns="0" rtlCol="0" anchor="ctr"/>
-          <a:lstStyle/>
-          <a:p>
-            <a:pPr algn="ctr" indent="0" marL="0">
-              <a:buNone/>
-            </a:pPr>
-            <a:r>
-              <a:rPr lang="en-US" sz="1000" b="1" dirty="0">
-                <a:solidFill>
-                  <a:srgbClr val="B5723B"/>
-                </a:solidFill>
-                <a:latin typeface="Cambria" pitchFamily="34" charset="0"/>
-                <a:ea typeface="Cambria" pitchFamily="34" charset="-122"/>
-                <a:cs typeface="Cambria" pitchFamily="34" charset="-120"/>
-              </a:rPr>
-              <a:t>RK</a:t>
-            </a:r>
-            <a:endParaRPr lang="en-US" sz="1000" dirty="0"/>
-          </a:p>
-        </p:txBody>
-      </p:sp>
-      <p:sp>
-        <p:nvSpPr>
-          <p:cNvPr id="4" name="Text 2"/>
-          <p:cNvSpPr/>
-          <p:nvPr/>
-        </p:nvSpPr>
-        <p:spPr>
-          <a:xfrm>
-            <a:off x="3200400" y="4626864"/>
-            <a:ext cx="5120640" cy="384048"/>
-          </a:xfrm>
-          <a:prstGeom prst="rect">
-            <a:avLst/>
-          </a:prstGeom>
-          <a:noFill/>
-          <a:ln/>
-        </p:spPr>
-        <p:txBody>
-          <a:bodyPr wrap="square" lIns="0" tIns="0" rIns="0" bIns="0" rtlCol="0" anchor="ctr"/>
-          <a:lstStyle/>
-          <a:p>
-            <a:pPr algn="r" indent="0" marL="0">
-              <a:buNone/>
-            </a:pPr>
-            <a:r>
-              <a:rPr lang="en-US" sz="900" dirty="0">
-                <a:solidFill>
-                  <a:srgbClr val="6E7B88"/>
-                </a:solidFill>
-              </a:rPr>
-              <a:t>راشد الكيتوب للمحاماة والاستشارات القانونية</a:t>
-            </a:r>
-            <a:endParaRPr lang="en-US" sz="900" dirty="0"/>
-          </a:p>
-        </p:txBody>
-      </p:sp>
-      <p:sp>
-        <p:nvSpPr>
-          <p:cNvPr id="5" name="Text 3"/>
+      <p:pic>
+        <p:nvPicPr>
+          <p:cNvPr id="2" name="Image 0" descr="/tmp/claude-0/-home-user-aa/b81485da-2e22-5d10-878f-01904e6d5dc6/scratchpad/rk/logo_light.png">    </p:cNvPr>
+          <p:cNvPicPr>
+            <a:picLocks noChangeAspect="1"/>
+          </p:cNvPicPr>
+          <p:nvPr/>
+        </p:nvPicPr>
+        <p:blipFill>
+          <a:blip r:embed="rId1"/>
+          <a:stretch>
+            <a:fillRect/>
+          </a:stretch>
+        </p:blipFill>
+        <p:spPr>
+          <a:xfrm>
+            <a:off x="7102823" y="4681728"/>
+            <a:ext cx="1675417" cy="274320"/>
+          </a:xfrm>
+          <a:prstGeom prst="rect">
+            <a:avLst/>
+          </a:prstGeom>
+        </p:spPr>
+      </p:pic>
+      <p:sp>
+        <p:nvSpPr>
+          <p:cNvPr id="3" name="Text 0"/>
           <p:cNvSpPr/>
           <p:nvPr>
-            <p:ph idx="103" type="title" hasCustomPrompt="1"/>
+            <p:ph idx="101" type="title" hasCustomPrompt="1"/>
           </p:nvPr>
         </p:nvSpPr>
         <p:spPr>
@@ -5332,41 +5180,40 @@
           </a:ln>
         </p:spPr>
       </p:sp>
-      <p:sp>
-        <p:nvSpPr>
-          <p:cNvPr id="3" name="Shape 1"/>
-          <p:cNvSpPr/>
-          <p:nvPr/>
-        </p:nvSpPr>
-        <p:spPr>
-          <a:xfrm>
-            <a:off x="7452360" y="868680"/>
-            <a:ext cx="822960" cy="822960"/>
-          </a:xfrm>
-          <a:prstGeom prst="rect">
-            <a:avLst/>
-          </a:prstGeom>
-          <a:solidFill>
-            <a:srgbClr val="0E2238"/>
-          </a:solidFill>
-          <a:ln w="12700">
-            <a:solidFill>
-              <a:srgbClr val="B5723B"/>
-            </a:solidFill>
-            <a:prstDash val="solid"/>
-          </a:ln>
-        </p:spPr>
-      </p:sp>
-      <p:sp>
-        <p:nvSpPr>
-          <p:cNvPr id="4" name="Text 2"/>
-          <p:cNvSpPr txBox="1"/>
-          <p:nvPr/>
-        </p:nvSpPr>
-        <p:spPr>
-          <a:xfrm>
-            <a:off x="7452360" y="868680"/>
-            <a:ext cx="822960" cy="822960"/>
+      <p:pic>
+        <p:nvPicPr>
+          <p:cNvPr id="3" name="Image 0" descr="/tmp/claude-0/-home-user-aa/b81485da-2e22-5d10-878f-01904e6d5dc6/scratchpad/rk/logo_dark.png">    </p:cNvPr>
+          <p:cNvPicPr>
+            <a:picLocks noChangeAspect="1"/>
+          </p:cNvPicPr>
+          <p:nvPr/>
+        </p:nvPicPr>
+        <p:blipFill>
+          <a:blip r:embed="rId1"/>
+          <a:stretch>
+            <a:fillRect/>
+          </a:stretch>
+        </p:blipFill>
+        <p:spPr>
+          <a:xfrm>
+            <a:off x="4254320" y="868680"/>
+            <a:ext cx="4021000" cy="658368"/>
+          </a:xfrm>
+          <a:prstGeom prst="rect">
+            <a:avLst/>
+          </a:prstGeom>
+        </p:spPr>
+      </p:pic>
+      <p:sp>
+        <p:nvSpPr>
+          <p:cNvPr id="4" name="Text 1"/>
+          <p:cNvSpPr txBox="1"/>
+          <p:nvPr/>
+        </p:nvSpPr>
+        <p:spPr>
+          <a:xfrm>
+            <a:off x="868680" y="1965960"/>
+            <a:ext cx="7406640" cy="1371600"/>
           </a:xfrm>
           <a:prstGeom prst="rect">
             <a:avLst/>
@@ -5378,93 +5225,18 @@
           <a:bodyPr wrap="square" lIns="0" tIns="0" rIns="0" bIns="0" rtlCol="0" anchor="ctr"/>
           <a:lstStyle/>
           <a:p>
-            <a:pPr algn="ctr" indent="0" marL="0">
-              <a:buNone/>
-            </a:pPr>
-            <a:r>
-              <a:rPr lang="en-US" sz="2400" b="1" dirty="0">
-                <a:solidFill>
-                  <a:schemeClr val="accent1"/>
+            <a:pPr rtl="1" algn="r" indent="0" marL="0">
+              <a:buNone/>
+            </a:pPr>
+            <a:r>
+              <a:rPr lang="ar-AE" altLang="en-US" sz="3200" b="1" dirty="0">
+                <a:solidFill>
+                  <a:schemeClr val="bg1"/>
                 </a:solidFill>
                 <a:latin typeface="Cambria" pitchFamily="34" charset="0"/>
                 <a:ea typeface="Cambria" pitchFamily="34" charset="-122"/>
                 <a:cs typeface="Cambria" pitchFamily="34" charset="-120"/>
               </a:rPr>
-              <a:t>RK</a:t>
-            </a:r>
-            <a:endParaRPr lang="en-US" sz="2400" dirty="0"/>
-          </a:p>
-        </p:txBody>
-      </p:sp>
-      <p:sp>
-        <p:nvSpPr>
-          <p:cNvPr id="5" name="Text 3"/>
-          <p:cNvSpPr txBox="1"/>
-          <p:nvPr/>
-        </p:nvSpPr>
-        <p:spPr>
-          <a:xfrm>
-            <a:off x="1325880" y="868680"/>
-            <a:ext cx="5943600" cy="822960"/>
-          </a:xfrm>
-          <a:prstGeom prst="rect">
-            <a:avLst/>
-          </a:prstGeom>
-          <a:noFill/>
-          <a:ln/>
-        </p:spPr>
-        <p:txBody>
-          <a:bodyPr wrap="square" lIns="0" tIns="0" rIns="0" bIns="0" rtlCol="0" anchor="ctr"/>
-          <a:lstStyle/>
-          <a:p>
-            <a:pPr rtl="1" algn="r" indent="0" marL="0">
-              <a:buNone/>
-            </a:pPr>
-            <a:r>
-              <a:rPr lang="ar-AE" altLang="en-US" sz="1200" dirty="0">
-                <a:solidFill>
-                  <a:schemeClr val="accent2"/>
-                </a:solidFill>
-              </a:rPr>
-              <a:t>راشد الكيتوب للمحاماة والاستشارات القانونية</a:t>
-            </a:r>
-            <a:endParaRPr lang="ar-AE" sz="1200" dirty="0"/>
-          </a:p>
-        </p:txBody>
-      </p:sp>
-      <p:sp>
-        <p:nvSpPr>
-          <p:cNvPr id="6" name="Text 4"/>
-          <p:cNvSpPr txBox="1"/>
-          <p:nvPr/>
-        </p:nvSpPr>
-        <p:spPr>
-          <a:xfrm>
-            <a:off x="868680" y="1965960"/>
-            <a:ext cx="7406640" cy="1371600"/>
-          </a:xfrm>
-          <a:prstGeom prst="rect">
-            <a:avLst/>
-          </a:prstGeom>
-          <a:noFill/>
-          <a:ln/>
-        </p:spPr>
-        <p:txBody>
-          <a:bodyPr wrap="square" lIns="0" tIns="0" rIns="0" bIns="0" rtlCol="0" anchor="ctr"/>
-          <a:lstStyle/>
-          <a:p>
-            <a:pPr rtl="1" algn="r" indent="0" marL="0">
-              <a:buNone/>
-            </a:pPr>
-            <a:r>
-              <a:rPr lang="ar-AE" altLang="en-US" sz="3200" b="1" dirty="0">
-                <a:solidFill>
-                  <a:schemeClr val="bg1"/>
-                </a:solidFill>
-                <a:latin typeface="Cambria" pitchFamily="34" charset="0"/>
-                <a:ea typeface="Cambria" pitchFamily="34" charset="-122"/>
-                <a:cs typeface="Cambria" pitchFamily="34" charset="-120"/>
-              </a:rPr>
               <a:t>الوصايا والميراث في الإمارات: ما تقوله الأرقام</a:t>
             </a:r>
             <a:endParaRPr lang="ar-AE" sz="3200" dirty="0"/>
@@ -5473,7 +5245,7 @@
       </p:sp>
       <p:sp>
         <p:nvSpPr>
-          <p:cNvPr id="7" name="Text 5"/>
+          <p:cNvPr id="5" name="Text 2"/>
           <p:cNvSpPr txBox="1"/>
           <p:nvPr/>
         </p:nvSpPr>
@@ -5509,7 +5281,7 @@
       </p:sp>
       <p:sp>
         <p:nvSpPr>
-          <p:cNvPr id="8" name="Text 6"/>
+          <p:cNvPr id="6" name="Text 3"/>
           <p:cNvSpPr txBox="1"/>
           <p:nvPr/>
         </p:nvSpPr>
@@ -5878,10 +5650,10 @@
       </p:sp>
       <p:sp>
         <p:nvSpPr>
-          <p:cNvPr id="10" name="Text 3"/>
+          <p:cNvPr id="10" name="Text 0"/>
           <p:cNvSpPr/>
           <p:nvPr>
-            <p:ph idx="103" type="title" hasCustomPrompt="1"/>
+            <p:ph idx="101" type="title" hasCustomPrompt="1"/>
           </p:nvPr>
         </p:nvSpPr>
         <p:spPr>
@@ -6569,10 +6341,10 @@
       </p:sp>
       <p:sp>
         <p:nvSpPr>
-          <p:cNvPr id="17" name="Text 3"/>
+          <p:cNvPr id="17" name="Text 0"/>
           <p:cNvSpPr/>
           <p:nvPr>
-            <p:ph idx="103" type="title" hasCustomPrompt="1"/>
+            <p:ph idx="101" type="title" hasCustomPrompt="1"/>
           </p:nvPr>
         </p:nvSpPr>
         <p:spPr>
@@ -8927,10 +8699,10 @@
       </p:sp>
       <p:sp>
         <p:nvSpPr>
-          <p:cNvPr id="6" name="Text 3"/>
+          <p:cNvPr id="6" name="Text 0"/>
           <p:cNvSpPr/>
           <p:nvPr>
-            <p:ph idx="103" type="title" hasCustomPrompt="1"/>
+            <p:ph idx="101" type="title" hasCustomPrompt="1"/>
           </p:nvPr>
         </p:nvSpPr>
         <p:spPr>
@@ -9290,10 +9062,10 @@
       </p:sp>
       <p:sp>
         <p:nvSpPr>
-          <p:cNvPr id="10" name="Text 3"/>
+          <p:cNvPr id="10" name="Text 0"/>
           <p:cNvSpPr/>
           <p:nvPr>
-            <p:ph idx="103" type="title" hasCustomPrompt="1"/>
+            <p:ph idx="101" type="title" hasCustomPrompt="1"/>
           </p:nvPr>
         </p:nvSpPr>
         <p:spPr>
@@ -9825,10 +9597,10 @@
       </p:sp>
       <p:sp>
         <p:nvSpPr>
-          <p:cNvPr id="13" name="Text 3"/>
+          <p:cNvPr id="13" name="Text 0"/>
           <p:cNvSpPr/>
           <p:nvPr>
-            <p:ph idx="103" type="title" hasCustomPrompt="1"/>
+            <p:ph idx="101" type="title" hasCustomPrompt="1"/>
           </p:nvPr>
         </p:nvSpPr>
         <p:spPr>
@@ -10525,10 +10297,10 @@
       </p:sp>
       <p:sp>
         <p:nvSpPr>
-          <p:cNvPr id="19" name="Text 3"/>
+          <p:cNvPr id="19" name="Text 0"/>
           <p:cNvSpPr/>
           <p:nvPr>
-            <p:ph idx="103" type="title" hasCustomPrompt="1"/>
+            <p:ph idx="101" type="title" hasCustomPrompt="1"/>
           </p:nvPr>
         </p:nvSpPr>
         <p:spPr>
@@ -11400,10 +11172,10 @@
       </p:sp>
       <p:sp>
         <p:nvSpPr>
-          <p:cNvPr id="17" name="Text 3"/>
+          <p:cNvPr id="17" name="Text 0"/>
           <p:cNvSpPr/>
           <p:nvPr>
-            <p:ph idx="103" type="title" hasCustomPrompt="1"/>
+            <p:ph idx="101" type="title" hasCustomPrompt="1"/>
           </p:nvPr>
         </p:nvSpPr>
         <p:spPr>
@@ -12091,10 +11863,10 @@
       </p:sp>
       <p:sp>
         <p:nvSpPr>
-          <p:cNvPr id="17" name="Text 3"/>
+          <p:cNvPr id="17" name="Text 0"/>
           <p:cNvSpPr/>
           <p:nvPr>
-            <p:ph idx="103" type="title" hasCustomPrompt="1"/>
+            <p:ph idx="101" type="title" hasCustomPrompt="1"/>
           </p:nvPr>
         </p:nvSpPr>
         <p:spPr>
@@ -12454,10 +12226,10 @@
       </p:sp>
       <p:sp>
         <p:nvSpPr>
-          <p:cNvPr id="10" name="Text 3"/>
+          <p:cNvPr id="10" name="Text 0"/>
           <p:cNvSpPr/>
           <p:nvPr>
-            <p:ph idx="103" type="title" hasCustomPrompt="1"/>
+            <p:ph idx="101" type="title" hasCustomPrompt="1"/>
           </p:nvPr>
         </p:nvSpPr>
         <p:spPr>
@@ -13154,10 +12926,10 @@
       </p:sp>
       <p:sp>
         <p:nvSpPr>
-          <p:cNvPr id="19" name="Text 3"/>
+          <p:cNvPr id="19" name="Text 0"/>
           <p:cNvSpPr/>
           <p:nvPr>
-            <p:ph idx="103" type="title" hasCustomPrompt="1"/>
+            <p:ph idx="101" type="title" hasCustomPrompt="1"/>
           </p:nvPr>
         </p:nvSpPr>
         <p:spPr>
@@ -13873,10 +13645,10 @@
       </p:sp>
       <p:sp>
         <p:nvSpPr>
-          <p:cNvPr id="12" name="Text 3"/>
+          <p:cNvPr id="12" name="Text 0"/>
           <p:cNvSpPr/>
           <p:nvPr>
-            <p:ph idx="103" type="title" hasCustomPrompt="1"/>
+            <p:ph idx="101" type="title" hasCustomPrompt="1"/>
           </p:nvPr>
         </p:nvSpPr>
         <p:spPr>
@@ -15434,10 +15206,10 @@
       </p:sp>
       <p:sp>
         <p:nvSpPr>
-          <p:cNvPr id="41" name="Text 3"/>
+          <p:cNvPr id="41" name="Text 0"/>
           <p:cNvSpPr/>
           <p:nvPr>
-            <p:ph idx="103" type="title" hasCustomPrompt="1"/>
+            <p:ph idx="101" type="title" hasCustomPrompt="1"/>
           </p:nvPr>
         </p:nvSpPr>
         <p:spPr>
@@ -16077,42 +15849,6 @@
       </p:sp>
       <p:sp>
         <p:nvSpPr>
-          <p:cNvPr id="13" name="Text 7"/>
-          <p:cNvSpPr txBox="1"/>
-          <p:nvPr/>
-        </p:nvSpPr>
-        <p:spPr>
-          <a:xfrm>
-            <a:off x="868680" y="4206240"/>
-            <a:ext cx="7406640" cy="365760"/>
-          </a:xfrm>
-          <a:prstGeom prst="rect">
-            <a:avLst/>
-          </a:prstGeom>
-          <a:noFill/>
-          <a:ln/>
-        </p:spPr>
-        <p:txBody>
-          <a:bodyPr wrap="square" lIns="0" tIns="0" rIns="0" bIns="0" rtlCol="0" anchor="ctr"/>
-          <a:lstStyle/>
-          <a:p>
-            <a:pPr rtl="1" algn="r" indent="0" marL="0">
-              <a:buNone/>
-            </a:pPr>
-            <a:r>
-              <a:rPr lang="ar-AE" altLang="en-US" sz="1000" dirty="0">
-                <a:solidFill>
-                  <a:schemeClr val="accent1"/>
-                </a:solidFill>
-              </a:rPr>
-              <a:t>راشد الكيتوب للمحاماة والاستشارات القانونية</a:t>
-            </a:r>
-            <a:endParaRPr lang="ar-AE" sz="1000" dirty="0"/>
-          </a:p>
-        </p:txBody>
-      </p:sp>
-      <p:sp>
-        <p:nvSpPr>
           <p:cNvPr id="25" name="Slide Number Placeholder 0"/>
           <p:cNvSpPr>
             <a:spLocks noGrp="1"/>
@@ -16810,10 +16546,10 @@
       </p:sp>
       <p:sp>
         <p:nvSpPr>
-          <p:cNvPr id="21" name="Text 3"/>
+          <p:cNvPr id="21" name="Text 0"/>
           <p:cNvSpPr/>
           <p:nvPr>
-            <p:ph idx="103" type="title" hasCustomPrompt="1"/>
+            <p:ph idx="101" type="title" hasCustomPrompt="1"/>
           </p:nvPr>
         </p:nvSpPr>
         <p:spPr>
@@ -17357,10 +17093,10 @@
       </p:sp>
       <p:sp>
         <p:nvSpPr>
-          <p:cNvPr id="10" name="Text 3"/>
+          <p:cNvPr id="10" name="Text 0"/>
           <p:cNvSpPr/>
           <p:nvPr>
-            <p:ph idx="103" type="title" hasCustomPrompt="1"/>
+            <p:ph idx="101" type="title" hasCustomPrompt="1"/>
           </p:nvPr>
         </p:nvSpPr>
         <p:spPr>
@@ -18555,10 +18291,10 @@
       </p:sp>
       <p:sp>
         <p:nvSpPr>
-          <p:cNvPr id="29" name="Text 3"/>
+          <p:cNvPr id="29" name="Text 0"/>
           <p:cNvSpPr/>
           <p:nvPr>
-            <p:ph idx="103" type="title" hasCustomPrompt="1"/>
+            <p:ph idx="101" type="title" hasCustomPrompt="1"/>
           </p:nvPr>
         </p:nvSpPr>
         <p:spPr>
@@ -18918,10 +18654,10 @@
       </p:sp>
       <p:sp>
         <p:nvSpPr>
-          <p:cNvPr id="10" name="Text 3"/>
+          <p:cNvPr id="10" name="Text 0"/>
           <p:cNvSpPr/>
           <p:nvPr>
-            <p:ph idx="103" type="title" hasCustomPrompt="1"/>
+            <p:ph idx="101" type="title" hasCustomPrompt="1"/>
           </p:nvPr>
         </p:nvSpPr>
         <p:spPr>
@@ -19295,10 +19031,10 @@
       </p:sp>
       <p:sp>
         <p:nvSpPr>
-          <p:cNvPr id="10" name="Text 3"/>
+          <p:cNvPr id="10" name="Text 0"/>
           <p:cNvSpPr/>
           <p:nvPr>
-            <p:ph idx="103" type="title" hasCustomPrompt="1"/>
+            <p:ph idx="101" type="title" hasCustomPrompt="1"/>
           </p:nvPr>
         </p:nvSpPr>
         <p:spPr>

--- a/presentations/06_UAE_Wills_Inheritance_Statistics_AR.pptx
+++ b/presentations/06_UAE_Wills_Inheritance_Statistics_AR.pptx
@@ -132,20 +132,20 @@
   <p:extLst>
     <p:ext uri="{521415D9-36F7-43E2-AB2F-B90AF26B5E84}">
       <p14:sectionLst xmlns:p14="http://schemas.microsoft.com/office/powerpoint/2010/main">
-        <p14:section name="المقدمة" id="{6a079376-c191-efcc-ef75-2c7e0673c840}">
+        <p14:section name="المقدمة" id="{0f2d3203-9520-fe54-ab0e-23532466f29f}">
           <p14:sldIdLst>
             <p14:sldId id="256"/>
             <p14:sldId id="257"/>
             <p14:sldId id="258"/>
           </p14:sldIdLst>
         </p14:section>
-        <p14:section name="السياق" id="{24b338fb-4d69-9ae1-1c40-d255101db0da}">
+        <p14:section name="السياق" id="{be51551e-44b3-9789-ac64-03d08aa66b43}">
           <p14:sldIdLst>
             <p14:sldId id="259"/>
             <p14:sldId id="260"/>
           </p14:sldIdLst>
         </p14:section>
-        <p14:section name="من يملك وصية" id="{696766bd-082f-324e-b2dc-885aada55b5c}">
+        <p14:section name="من يملك وصية" id="{7dac94ac-b048-dff0-245b-0cac1d1ec6b4}">
           <p14:sldIdLst>
             <p14:sldId id="261"/>
             <p14:sldId id="262"/>
@@ -156,7 +156,7 @@
             <p14:sldId id="267"/>
           </p14:sldIdLst>
         </p14:section>
-        <p14:section name="السرعة والمشاكل" id="{06a136ed-f9c0-55f4-5e3a-dad5d336e8e3}">
+        <p14:section name="السرعة والمشاكل" id="{b03f6c4d-1ad0-0a1b-af3c-14f63a4c85be}">
           <p14:sldIdLst>
             <p14:sldId id="268"/>
             <p14:sldId id="269"/>
@@ -165,7 +165,7 @@
             <p14:sldId id="272"/>
           </p14:sldIdLst>
         </p14:section>
-        <p14:section name="الشركات" id="{1a31948f-44a7-b210-9385-462d64d3ea53}">
+        <p14:section name="الشركات" id="{018033b0-1d88-ed1f-93e0-4ed9a3a26225}">
           <p14:sldIdLst>
             <p14:sldId id="273"/>
             <p14:sldId id="274"/>
@@ -173,7 +173,7 @@
             <p14:sldId id="276"/>
           </p14:sldIdLst>
         </p14:section>
-        <p14:section name="حدود البيانات" id="{1c3d6d0e-68b2-22af-81d3-bf45310183f6}">
+        <p14:section name="حدود البيانات" id="{61465e12-daaa-3526-3437-af68d4ca1561}">
           <p14:sldIdLst>
             <p14:sldId id="277"/>
             <p14:sldId id="278"/>
